--- a/菜單 QR BB.pptx
+++ b/菜單 QR BB.pptx
@@ -5548,10 +5548,10 @@
       </p:sp>
       <p:pic>
         <p:nvPicPr>
-          <p:cNvPr id="4" name="圖片 3">
+          <p:cNvPr id="3" name="圖形 2">
             <a:extLst>
               <a:ext uri="{FF2B5EF4-FFF2-40B4-BE49-F238E27FC236}">
-                <a16:creationId xmlns:a16="http://schemas.microsoft.com/office/drawing/2014/main" id="{639A8F57-A0B4-FB99-0292-5C7045369EED}"/>
+                <a16:creationId xmlns:a16="http://schemas.microsoft.com/office/drawing/2014/main" id="{3C563177-5242-0C02-1361-845A8C182A81}"/>
               </a:ext>
             </a:extLst>
           </p:cNvPr>
@@ -5561,15 +5561,22 @@
           <p:nvPr/>
         </p:nvPicPr>
         <p:blipFill>
-          <a:blip r:embed="rId2"/>
+          <a:blip>
+            <a:extLst>
+              <a:ext uri="{96DAC541-7B7A-43D3-8B79-37D633B846F1}">
+                <asvg:svgBlip xmlns:asvg="http://schemas.microsoft.com/office/drawing/2016/SVG/main" r:embed="rId2"/>
+              </a:ext>
+            </a:extLst>
+          </a:blip>
+          <a:srcRect l="7558" t="8635" r="7899" b="8406"/>
           <a:stretch>
             <a:fillRect/>
           </a:stretch>
         </p:blipFill>
         <p:spPr>
           <a:xfrm>
-            <a:off x="1855676" y="1848246"/>
-            <a:ext cx="1665509" cy="1665509"/>
+            <a:off x="1855706" y="1863877"/>
+            <a:ext cx="1665450" cy="1634247"/>
           </a:xfrm>
           <a:prstGeom prst="rect">
             <a:avLst/>
